--- a/00.presentacion-inicial-OOP.pptx
+++ b/00.presentacion-inicial-OOP.pptx
@@ -20,51 +20,11 @@
   <p:notesSz cx="6858000" cy="9144000"/>
   <p:embeddedFontLst>
     <p:embeddedFont>
-      <p:font typeface="Livvic" pitchFamily="2" charset="0"/>
+      <p:font typeface="Saira" panose="020B0604020202020204" charset="0"/>
       <p:regular r:id="rId10"/>
       <p:bold r:id="rId11"/>
       <p:italic r:id="rId12"/>
       <p:boldItalic r:id="rId13"/>
-    </p:embeddedFont>
-    <p:embeddedFont>
-      <p:font typeface="Montserrat" panose="00000500000000000000" pitchFamily="2" charset="0"/>
-      <p:regular r:id="rId14"/>
-      <p:bold r:id="rId15"/>
-      <p:italic r:id="rId16"/>
-      <p:boldItalic r:id="rId17"/>
-    </p:embeddedFont>
-    <p:embeddedFont>
-      <p:font typeface="Nunito" pitchFamily="2" charset="0"/>
-      <p:regular r:id="rId18"/>
-      <p:bold r:id="rId19"/>
-      <p:italic r:id="rId20"/>
-      <p:boldItalic r:id="rId21"/>
-    </p:embeddedFont>
-    <p:embeddedFont>
-      <p:font typeface="Roboto" panose="02000000000000000000" pitchFamily="2" charset="0"/>
-      <p:regular r:id="rId22"/>
-      <p:bold r:id="rId23"/>
-      <p:italic r:id="rId24"/>
-      <p:boldItalic r:id="rId25"/>
-    </p:embeddedFont>
-    <p:embeddedFont>
-      <p:font typeface="Roboto Condensed Light" panose="02000000000000000000" pitchFamily="2" charset="0"/>
-      <p:regular r:id="rId26"/>
-      <p:italic r:id="rId27"/>
-    </p:embeddedFont>
-    <p:embeddedFont>
-      <p:font typeface="Saira" panose="020B0604020202020204" charset="0"/>
-      <p:regular r:id="rId28"/>
-      <p:bold r:id="rId29"/>
-      <p:italic r:id="rId30"/>
-      <p:boldItalic r:id="rId31"/>
-    </p:embeddedFont>
-    <p:embeddedFont>
-      <p:font typeface="Saira SemiBold" panose="020B0604020202020204" charset="0"/>
-      <p:regular r:id="rId32"/>
-      <p:bold r:id="rId33"/>
-      <p:italic r:id="rId34"/>
-      <p:boldItalic r:id="rId35"/>
     </p:embeddedFont>
   </p:embeddedFontLst>
   <p:defaultTextStyle>
@@ -301,52 +261,67 @@
       <p15:sldGuideLst xmlns:p15="http://schemas.microsoft.com/office/powerpoint/2012/main"/>
     </p:ext>
     <p:ext uri="http://customooxmlschemas.google.com/">
-      <go:slidesCustomData xmlns:go="http://customooxmlschemas.google.com/" xmlns:ahyp="http://schemas.microsoft.com/office/drawing/2018/hyperlinkcolor" xmlns:p15="http://schemas.microsoft.com/office/powerpoint/2012/main" xmlns:p14="http://schemas.microsoft.com/office/powerpoint/2010/main" xmlns:com="http://schemas.openxmlformats.org/drawingml/2006/compatibility" xmlns:pvml="urn:schemas-microsoft-com:office:powerpoint" xmlns:v="urn:schemas-microsoft-com:vml" xmlns:o="urn:schemas-microsoft-com:office:office" xmlns:dgm="http://schemas.openxmlformats.org/drawingml/2006/diagram" xmlns:c="http://schemas.openxmlformats.org/drawingml/2006/chart" xmlns:mv="urn:schemas-microsoft-com:mac:vml" xmlns:mc="http://schemas.openxmlformats.org/markup-compatibility/2006" xmlns="" r:id="rId36" roundtripDataSignature="AMtx7mhvwoM9eB9/dioecwqT0tewQNWU8w=="/>
+      <go:slidesCustomData xmlns="" xmlns:mc="http://schemas.openxmlformats.org/markup-compatibility/2006" xmlns:mv="urn:schemas-microsoft-com:mac:vml" xmlns:c="http://schemas.openxmlformats.org/drawingml/2006/chart" xmlns:dgm="http://schemas.openxmlformats.org/drawingml/2006/diagram" xmlns:o="urn:schemas-microsoft-com:office:office" xmlns:v="urn:schemas-microsoft-com:vml" xmlns:pvml="urn:schemas-microsoft-com:office:powerpoint" xmlns:com="http://schemas.openxmlformats.org/drawingml/2006/compatibility" xmlns:p14="http://schemas.microsoft.com/office/powerpoint/2010/main" xmlns:p15="http://schemas.microsoft.com/office/powerpoint/2012/main" xmlns:ahyp="http://schemas.microsoft.com/office/drawing/2018/hyperlinkcolor" xmlns:go="http://customooxmlschemas.google.com/" r:id="rId36" roundtripDataSignature="AMtx7mhvwoM9eB9/dioecwqT0tewQNWU8w=="/>
     </p:ext>
   </p:extLst>
 </p:presentation>
 </file>
 
+<file path=ppt/revisionInfo.xml><?xml version="1.0" encoding="utf-8"?>
+<p1510:revInfo xmlns:a="http://schemas.openxmlformats.org/drawingml/2006/main" xmlns:r="http://schemas.openxmlformats.org/officeDocument/2006/relationships" xmlns:p1510="http://schemas.microsoft.com/office/powerpoint/2015/10/main">
+  <p1510:revLst>
+    <p1510:client id="{87E6DCE1-C699-2FA0-55DB-47766938BC72}" v="126" dt="2026-07-21T23:12:06.126"/>
+  </p1510:revLst>
+</p1510:revInfo>
+</file>
+
 <file path=ppt/changesInfos/changesInfo1.xml><?xml version="1.0" encoding="utf-8"?>
 <pc:chgInfo xmlns:a="http://schemas.openxmlformats.org/drawingml/2006/main" xmlns:r="http://schemas.openxmlformats.org/officeDocument/2006/relationships" xmlns:ac="http://schemas.microsoft.com/office/drawing/2013/main/command" xmlns:pc="http://schemas.microsoft.com/office/powerpoint/2013/main/command">
   <pc:docChgLst>
-    <pc:chgData name="Norbey Muñoz" userId="b7e811e8891ccd42" providerId="LiveId" clId="{7A9D10B8-45EB-48FB-89DA-3B884F36BEE7}"/>
+    <pc:chgData name="Norbey Muñoz" userId="b7e811e8891ccd42" providerId="Windows Live" clId="Web-{87E6DCE1-C699-2FA0-55DB-47766938BC72}"/>
     <pc:docChg chg="modSld">
-      <pc:chgData name="Norbey Muñoz" userId="b7e811e8891ccd42" providerId="LiveId" clId="{7A9D10B8-45EB-48FB-89DA-3B884F36BEE7}" dt="2026-05-13T15:19:54.753" v="71" actId="20577"/>
+      <pc:chgData name="Norbey Muñoz" userId="b7e811e8891ccd42" providerId="Windows Live" clId="Web-{87E6DCE1-C699-2FA0-55DB-47766938BC72}" dt="2026-07-21T23:12:06.126" v="87" actId="20577"/>
       <pc:docMkLst>
         <pc:docMk/>
       </pc:docMkLst>
-      <pc:sldChg chg="modSp mod">
-        <pc:chgData name="Norbey Muñoz" userId="b7e811e8891ccd42" providerId="LiveId" clId="{7A9D10B8-45EB-48FB-89DA-3B884F36BEE7}" dt="2026-05-13T15:18:59.812" v="20" actId="20577"/>
+      <pc:sldChg chg="modSp">
+        <pc:chgData name="Norbey Muñoz" userId="b7e811e8891ccd42" providerId="Windows Live" clId="Web-{87E6DCE1-C699-2FA0-55DB-47766938BC72}" dt="2026-07-21T23:09:53.437" v="22" actId="20577"/>
         <pc:sldMkLst>
           <pc:docMk/>
-          <pc:sldMk cId="0" sldId="256"/>
+          <pc:sldMk cId="3861613165" sldId="261"/>
         </pc:sldMkLst>
         <pc:spChg chg="mod">
-          <ac:chgData name="Norbey Muñoz" userId="b7e811e8891ccd42" providerId="LiveId" clId="{7A9D10B8-45EB-48FB-89DA-3B884F36BEE7}" dt="2026-05-13T15:18:59.812" v="20" actId="20577"/>
+          <ac:chgData name="Norbey Muñoz" userId="b7e811e8891ccd42" providerId="Windows Live" clId="Web-{87E6DCE1-C699-2FA0-55DB-47766938BC72}" dt="2026-07-21T23:09:53.437" v="22" actId="20577"/>
           <ac:spMkLst>
             <pc:docMk/>
-            <pc:sldMk cId="0" sldId="256"/>
-            <ac:spMk id="3" creationId="{F6E5FE4C-F0A4-04D9-BDF6-552D3C5B8C83}"/>
-          </ac:spMkLst>
-        </pc:spChg>
-        <pc:spChg chg="mod">
-          <ac:chgData name="Norbey Muñoz" userId="b7e811e8891ccd42" providerId="LiveId" clId="{7A9D10B8-45EB-48FB-89DA-3B884F36BEE7}" dt="2026-05-13T15:18:56.313" v="18" actId="20577"/>
-          <ac:spMkLst>
-            <pc:docMk/>
-            <pc:sldMk cId="0" sldId="256"/>
-            <ac:spMk id="98" creationId="{00000000-0000-0000-0000-000000000000}"/>
+            <pc:sldMk cId="3861613165" sldId="261"/>
+            <ac:spMk id="3" creationId="{A7D22AAA-EFD0-C1F6-02C5-747DB3A98B32}"/>
           </ac:spMkLst>
         </pc:spChg>
       </pc:sldChg>
-      <pc:sldChg chg="modSp mod">
-        <pc:chgData name="Norbey Muñoz" userId="b7e811e8891ccd42" providerId="LiveId" clId="{7A9D10B8-45EB-48FB-89DA-3B884F36BEE7}" dt="2026-05-13T15:19:54.753" v="71" actId="20577"/>
+      <pc:sldChg chg="modSp">
+        <pc:chgData name="Norbey Muñoz" userId="b7e811e8891ccd42" providerId="Windows Live" clId="Web-{87E6DCE1-C699-2FA0-55DB-47766938BC72}" dt="2026-07-21T23:11:16" v="44" actId="20577"/>
+        <pc:sldMkLst>
+          <pc:docMk/>
+          <pc:sldMk cId="1514910766" sldId="262"/>
+        </pc:sldMkLst>
+        <pc:spChg chg="mod">
+          <ac:chgData name="Norbey Muñoz" userId="b7e811e8891ccd42" providerId="Windows Live" clId="Web-{87E6DCE1-C699-2FA0-55DB-47766938BC72}" dt="2026-07-21T23:11:16" v="44" actId="20577"/>
+          <ac:spMkLst>
+            <pc:docMk/>
+            <pc:sldMk cId="1514910766" sldId="262"/>
+            <ac:spMk id="3" creationId="{C267E7DC-89DB-A13E-3720-6C1EFF9B4A6E}"/>
+          </ac:spMkLst>
+        </pc:spChg>
+      </pc:sldChg>
+      <pc:sldChg chg="modSp">
+        <pc:chgData name="Norbey Muñoz" userId="b7e811e8891ccd42" providerId="Windows Live" clId="Web-{87E6DCE1-C699-2FA0-55DB-47766938BC72}" dt="2026-07-21T23:12:06.126" v="87" actId="20577"/>
         <pc:sldMkLst>
           <pc:docMk/>
           <pc:sldMk cId="0" sldId="263"/>
         </pc:sldMkLst>
         <pc:spChg chg="mod">
-          <ac:chgData name="Norbey Muñoz" userId="b7e811e8891ccd42" providerId="LiveId" clId="{7A9D10B8-45EB-48FB-89DA-3B884F36BEE7}" dt="2026-05-13T15:19:54.753" v="71" actId="20577"/>
+          <ac:chgData name="Norbey Muñoz" userId="b7e811e8891ccd42" providerId="Windows Live" clId="Web-{87E6DCE1-C699-2FA0-55DB-47766938BC72}" dt="2026-07-21T23:12:06.126" v="87" actId="20577"/>
           <ac:spMkLst>
             <pc:docMk/>
             <pc:sldMk cId="0" sldId="263"/>
@@ -29841,7 +29816,7 @@
           <a:noFill/>
         </p:spPr>
         <p:txBody>
-          <a:bodyPr wrap="square">
+          <a:bodyPr wrap="square" lIns="91440" tIns="45720" rIns="91440" bIns="45720" anchor="t">
             <a:spAutoFit/>
           </a:bodyPr>
           <a:lstStyle/>
@@ -29851,12 +29826,16 @@
               <a:buChar char="•"/>
             </a:pPr>
             <a:r>
-              <a:rPr lang="es-ES" sz="2400" b="1" dirty="0"/>
-              <a:t>Regla Peralta v1</a:t>
+              <a:rPr lang="es-ES" sz="2400" b="1"/>
+              <a:t>Regla 1</a:t>
+            </a:r>
+            <a:r>
+              <a:rPr lang="es-ES" sz="2400"/>
+              <a:t>: registrar la mitad o menos de la mitad de las </a:t>
             </a:r>
             <a:r>
               <a:rPr lang="es-ES" sz="2400" dirty="0"/>
-              <a:t>: registrar la mitad o menos de la mitad de las asistencias en el corte no le permitirá presentar el parcial.</a:t>
+              <a:t>asistencias en el corte no le permitirá presentar el parcial.</a:t>
             </a:r>
           </a:p>
           <a:p>
@@ -29897,14 +29876,22 @@
               <a:buChar char="•"/>
             </a:pPr>
             <a:r>
-              <a:rPr lang="es-ES" sz="2400" b="1" dirty="0"/>
-              <a:t>Regla Peralta v2</a:t>
+              <a:rPr lang="es-ES" sz="2400" b="1"/>
+              <a:t>Regla 2</a:t>
+            </a:r>
+            <a:r>
+              <a:rPr lang="es-ES" sz="2400"/>
+              <a:t>: la inasistencia a una clase en la que se realiza </a:t>
             </a:r>
             <a:r>
               <a:rPr lang="es-ES" sz="2400" dirty="0"/>
-              <a:t>: la inasistencia a una clase en la que se realiza alguna actividad evaluativa como quiz, taller o parcial deberá justificarse para permitirse la presentación posterior. En caso de no tener justificación se permitirá la realización y/o entrega, pero nunca superando el valor de nota de tres (3,0).</a:t>
+              <a:t>alguna actividad evaluativa como quiz, taller o parcial deberá justificarse para permitirse la presentación posterior. En caso de no tener justificación se permitirá la realización y/o entrega, pero nunca superando el valor </a:t>
             </a:r>
-            <a:endParaRPr lang="es-ES" sz="2000" dirty="0">
+            <a:r>
+              <a:rPr lang="es-ES" sz="2400"/>
+              <a:t>aprobatorio de la nota (por ejemplo 3,0 o 60).</a:t>
+            </a:r>
+            <a:endParaRPr lang="es-ES" sz="2000">
               <a:solidFill>
                 <a:schemeClr val="accent1"/>
               </a:solidFill>
@@ -30088,7 +30075,7 @@
           <a:noFill/>
         </p:spPr>
         <p:txBody>
-          <a:bodyPr wrap="square">
+          <a:bodyPr wrap="square" lIns="91440" tIns="45720" rIns="91440" bIns="45720" anchor="t">
             <a:spAutoFit/>
           </a:bodyPr>
           <a:lstStyle/>
@@ -30099,11 +30086,27 @@
             </a:pPr>
             <a:r>
               <a:rPr lang="es-ES" sz="2400" b="1" dirty="0"/>
-              <a:t>Regla Córdoba</a:t>
+              <a:t>Regla 3</a:t>
             </a:r>
             <a:r>
               <a:rPr lang="es-ES" sz="2400" dirty="0"/>
-              <a:t>: el uso de Inteligencia Artificial (IA) está prohibida en los quices* y parciales. En los talleres o actividades no evaluativas de clase puede emplearse siempre y cuando se indague el porqué la solución es la brindada por la IA. </a:t>
+              <a:t>: el uso de Inteligencia Artificial (IA) está prohibida en los </a:t>
+            </a:r>
+            <a:r>
+              <a:rPr lang="es-ES" sz="2400" dirty="0" err="1"/>
+              <a:t>quices</a:t>
+            </a:r>
+            <a:r>
+              <a:rPr lang="es-ES" sz="2400" dirty="0"/>
+              <a:t>* y parciales. En los talleres o actividades no evaluativas de clase puede emplearse siempre y cuando se indague </a:t>
+            </a:r>
+            <a:r>
+              <a:rPr lang="es-ES" sz="2400" dirty="0" err="1"/>
+              <a:t>el porqué</a:t>
+            </a:r>
+            <a:r>
+              <a:rPr lang="es-ES" sz="2400" dirty="0"/>
+              <a:t> la solución es la brindada por la IA. </a:t>
             </a:r>
           </a:p>
           <a:p>
@@ -30128,7 +30131,23 @@
                   <a:schemeClr val="accent1"/>
                 </a:solidFill>
               </a:rPr>
-              <a:t>En los quices podría usarse, dependiendo el tema y el avance con el curso.</a:t>
+              <a:t>En los </a:t>
+            </a:r>
+            <a:r>
+              <a:rPr lang="es-ES" sz="2000" dirty="0" err="1">
+                <a:solidFill>
+                  <a:schemeClr val="accent1"/>
+                </a:solidFill>
+              </a:rPr>
+              <a:t>quices</a:t>
+            </a:r>
+            <a:r>
+              <a:rPr lang="es-ES" sz="2000" dirty="0">
+                <a:solidFill>
+                  <a:schemeClr val="accent1"/>
+                </a:solidFill>
+              </a:rPr>
+              <a:t> podría usarse, dependiendo el tema y el avance con el curso.</a:t>
             </a:r>
           </a:p>
           <a:p>
@@ -30158,12 +30177,16 @@
               <a:buChar char="•"/>
             </a:pPr>
             <a:r>
-              <a:rPr lang="es-ES" sz="2400" b="1" dirty="0"/>
-              <a:t>Regla Sierra</a:t>
+              <a:rPr lang="es-ES" sz="2400" b="1"/>
+              <a:t>Regla 4</a:t>
+            </a:r>
+            <a:r>
+              <a:rPr lang="es-ES" sz="2400"/>
+              <a:t>: sea consciente de que la nota la va construyendo usted </a:t>
             </a:r>
             <a:r>
               <a:rPr lang="es-ES" sz="2400" dirty="0"/>
-              <a:t>: sea consciente de que la nota la va construyendo usted a lo largo del semestre. Sea constante y realice los trabajos solicitados, estudie y resuelva dudas. Al finalizar las clases del semestre el profesor </a:t>
+              <a:t>a lo largo del semestre. Sea constante y realice los trabajos solicitados, estudie y resuelva dudas. Al finalizar las clases del semestre el profesor </a:t>
             </a:r>
             <a:r>
               <a:rPr lang="es-ES" sz="2400" b="1" dirty="0"/>
@@ -30196,12 +30219,12 @@
               <a:buChar char="•"/>
             </a:pPr>
             <a:r>
-              <a:rPr lang="es-ES" sz="2000" dirty="0">
+              <a:rPr lang="es-ES" sz="2000">
                 <a:solidFill>
                   <a:schemeClr val="accent1"/>
                 </a:solidFill>
               </a:rPr>
-              <a:t>Un 2,89 es un 2,89. Un 2,93 es un 2,93. Asegúrese de lograr sus notas y objetivos </a:t>
+              <a:t>Un 58,8 es un 58,8 (59). Asegúrese de lograr sus notas y objetivos </a:t>
             </a:r>
             <a:r>
               <a:rPr lang="es-ES" sz="2000" dirty="0">
@@ -32336,26 +32359,47 @@
           <a:p>
             <a:pPr marL="0" indent="0" algn="just"/>
             <a:r>
-              <a:rPr lang="es-CO" dirty="0"/>
-              <a:t>* Nombre</a:t>
+              <a:rPr lang="es-CO" sz="1850"/>
+              <a:t>* Nombre, edad</a:t>
+            </a:r>
+            <a:endParaRPr lang="es-CO" dirty="0"/>
+          </a:p>
+          <a:p>
+            <a:pPr marL="0" indent="0" algn="just"/>
+            <a:r>
+              <a:rPr lang="es-CO" sz="1850" dirty="0"/>
+              <a:t>* Solo estudia o también </a:t>
+            </a:r>
+            <a:r>
+              <a:rPr lang="es-CO" sz="1850"/>
+              <a:t>trabaja</a:t>
+            </a:r>
+            <a:endParaRPr lang="es-CO" sz="1850" dirty="0"/>
+          </a:p>
+          <a:p>
+            <a:pPr marL="0" indent="0" algn="just"/>
+            <a:r>
+              <a:rPr lang="es-CO" sz="1850" dirty="0"/>
+              <a:t>* </a:t>
+            </a:r>
+            <a:r>
+              <a:rPr lang="es-CO" sz="1850"/>
+              <a:t>Carrera y semestre de</a:t>
+            </a:r>
+            <a:r>
+              <a:rPr lang="es-CO" sz="1850" dirty="0"/>
+              <a:t> la carrera</a:t>
             </a:r>
           </a:p>
           <a:p>
             <a:pPr marL="0" indent="0" algn="just"/>
             <a:r>
-              <a:rPr lang="es-CO" dirty="0"/>
-              <a:t>* Semestre de la carrera</a:t>
-            </a:r>
-          </a:p>
-          <a:p>
-            <a:pPr marL="0" indent="0" algn="just"/>
-            <a:r>
-              <a:rPr lang="es-CO" dirty="0"/>
-              <a:t>* </a:t>
+              <a:rPr lang="es-CO" sz="1850" dirty="0"/>
+              <a:t>* Ha trabajado algo sobre </a:t>
             </a:r>
             <a:r>
-              <a:rPr lang="es-CO"/>
-              <a:t>Ha trabajado algo sobre P</a:t>
+              <a:rPr lang="es-CO" sz="1850"/>
+              <a:t>Programación</a:t>
             </a:r>
             <a:endParaRPr lang="es-CO" dirty="0"/>
           </a:p>
